--- a/dist/초1/철학·논리·심리·교육·종교/배움과감정/초1_철학·논리·심리·교육·종교_배움과감정_01_할일나누기와느낌_학생용.pptx
+++ b/dist/초1/철학·논리·심리·교육·종교/배움과감정/초1_철학·논리·심리·교육·종교_배움과감정_01_할일나누기와느낌_학생용.pptx
@@ -118,44 +118,44 @@
   <p:extLst>
     <p:ext uri="{521415D9-36F7-43E2-AB2F-B90AF26B5E84}">
       <p14:sectionLst xmlns:p14="http://schemas.microsoft.com/office/powerpoint/2010/main">
-        <p14:section name="도입" id="{47bd7433-4388-b356-1bc7-fcfadb60b5f9}">
+        <p14:section name="도입" id="{ac921d82-1a5c-9467-639b-15ddf1c37ccd}">
           <p14:sldIdLst>
             <p14:sldId id="256"/>
             <p14:sldId id="257"/>
           </p14:sldIdLst>
         </p14:section>
-        <p14:section name="개념" id="{7edf7474-592e-d64b-5a6f-4a0af7b288a1}">
+        <p14:section name="개념" id="{033632e6-3152-f74e-84ad-ecd783f3527a}">
           <p14:sldIdLst>
             <p14:sldId id="258"/>
             <p14:sldId id="259"/>
             <p14:sldId id="261"/>
           </p14:sldIdLst>
         </p14:section>
-        <p14:section name="연습" id="{a1885988-59fb-a499-62dc-ab9f04bf9430}">
+        <p14:section name="연습" id="{0f677efe-c9a3-01ba-4447-eb9bf05014e0}">
           <p14:sldIdLst>
             <p14:sldId id="260"/>
             <p14:sldId id="262"/>
             <p14:sldId id="263"/>
           </p14:sldIdLst>
         </p14:section>
-        <p14:section name="개념" id="{c3b6353b-f473-d259-85e0-f52e012fcc94}">
+        <p14:section name="개념" id="{959313b6-cad4-d7ec-2772-254c57d82a4c}">
           <p14:sldIdLst/>
         </p14:section>
-        <p14:section name="연습" id="{82fc62f0-d215-3e95-13ef-7b5dec6e6da2}">
+        <p14:section name="연습" id="{cda7c197-e1ed-ad40-7976-cd15c3955522}">
           <p14:sldIdLst/>
         </p14:section>
-        <p14:section name="확인" id="{4c44912d-6f19-be3a-cded-79549a409980}">
+        <p14:section name="확인" id="{ae09ba46-34c3-2baf-8ad6-29ec7b26eaca}">
           <p14:sldIdLst>
             <p14:sldId id="264"/>
             <p14:sldId id="265"/>
           </p14:sldIdLst>
         </p14:section>
-        <p14:section name="정리" id="{b197f453-22f2-dfbd-c3a8-d1fdfc4b8bbe}">
+        <p14:section name="정리" id="{8536489a-5685-9828-477c-1ad89a936528}">
           <p14:sldIdLst>
             <p14:sldId id="266"/>
           </p14:sldIdLst>
         </p14:section>
-        <p14:section name="보충" id="{c30f225d-86fa-953f-a365-715c7fc206e0}">
+        <p14:section name="보충" id="{78a9759b-5f5d-6ed1-7eef-1f71e56971a6}">
           <p14:sldIdLst>
             <p14:sldId id="267"/>
           </p14:sldIdLst>
